--- a/entregas/Entrega04.pptx
+++ b/entregas/Entrega04.pptx
@@ -135,7 +135,7 @@
       </p:grpSpPr>
       <p:sp>
         <p:nvSpPr>
-          <p:cNvPr id="1696859451" name="Header Placeholder 1"/>
+          <p:cNvPr id="572316974" name="Header Placeholder 1"/>
           <p:cNvSpPr>
             <a:spLocks noGrp="1"/>
           </p:cNvSpPr>
@@ -169,7 +169,7 @@
       </p:sp>
       <p:sp>
         <p:nvSpPr>
-          <p:cNvPr id="8321704" name="Date Placeholder 2"/>
+          <p:cNvPr id="1309593924" name="Date Placeholder 2"/>
           <p:cNvSpPr>
             <a:spLocks noGrp="1"/>
           </p:cNvSpPr>
@@ -207,7 +207,7 @@
       </p:sp>
       <p:sp>
         <p:nvSpPr>
-          <p:cNvPr id="996040678" name="Slide Image Placeholder 3"/>
+          <p:cNvPr id="73774403" name="Slide Image Placeholder 3"/>
           <p:cNvSpPr>
             <a:spLocks noChangeAspect="1" noGrp="1" noRot="1"/>
           </p:cNvSpPr>
@@ -243,7 +243,7 @@
       </p:sp>
       <p:sp>
         <p:nvSpPr>
-          <p:cNvPr id="195152607" name="Notes Placeholder 4"/>
+          <p:cNvPr id="188144407" name="Notes Placeholder 4"/>
           <p:cNvSpPr>
             <a:spLocks noGrp="1"/>
           </p:cNvSpPr>
@@ -317,7 +317,7 @@
       </p:sp>
       <p:sp>
         <p:nvSpPr>
-          <p:cNvPr id="912015646" name="Footer Placeholder 5"/>
+          <p:cNvPr id="436508721" name="Footer Placeholder 5"/>
           <p:cNvSpPr>
             <a:spLocks noGrp="1"/>
           </p:cNvSpPr>
@@ -351,7 +351,7 @@
       </p:sp>
       <p:sp>
         <p:nvSpPr>
-          <p:cNvPr id="1306394367" name="Slide Number Placeholder 6"/>
+          <p:cNvPr id="1164755421" name="Slide Number Placeholder 6"/>
           <p:cNvSpPr>
             <a:spLocks noGrp="1"/>
           </p:cNvSpPr>
@@ -504,7 +504,7 @@
       </p:grpSpPr>
       <p:sp>
         <p:nvSpPr>
-          <p:cNvPr id="621144274" name="Slide Image Placeholder 1"/>
+          <p:cNvPr id="508251434" name="Slide Image Placeholder 1"/>
           <p:cNvSpPr>
             <a:spLocks noChangeAspect="1" noGrp="1" noRot="1"/>
           </p:cNvSpPr>
@@ -521,7 +521,7 @@
       </p:sp>
       <p:sp>
         <p:nvSpPr>
-          <p:cNvPr id="1556192663" name="Notes Placeholder 2"/>
+          <p:cNvPr id="1293418767" name="Notes Placeholder 2"/>
           <p:cNvSpPr>
             <a:spLocks noGrp="1"/>
           </p:cNvSpPr>
@@ -546,7 +546,7 @@
       </p:sp>
       <p:sp>
         <p:nvSpPr>
-          <p:cNvPr id="1081339340" name="Slide Number Placeholder 3"/>
+          <p:cNvPr id="246783553" name="Slide Number Placeholder 3"/>
           <p:cNvSpPr>
             <a:spLocks noGrp="1"/>
           </p:cNvSpPr>
@@ -597,7 +597,7 @@
       </p:grpSpPr>
       <p:sp>
         <p:nvSpPr>
-          <p:cNvPr id="2" name="Slide Image Placeholder 1"/>
+          <p:cNvPr id="845784926" name="Slide Image Placeholder 1"/>
           <p:cNvSpPr>
             <a:spLocks noChangeAspect="1" noGrp="1" noRot="1"/>
           </p:cNvSpPr>
@@ -609,7 +609,7 @@
       </p:sp>
       <p:sp>
         <p:nvSpPr>
-          <p:cNvPr id="3" name="Notes Placeholder 2"/>
+          <p:cNvPr id="1367570947" name="Notes Placeholder 2"/>
           <p:cNvSpPr>
             <a:spLocks noGrp="1"/>
           </p:cNvSpPr>
@@ -631,7 +631,7 @@
       </p:sp>
       <p:sp>
         <p:nvSpPr>
-          <p:cNvPr id="4" name="Slide Number Placeholder 3"/>
+          <p:cNvPr id="795073436" name="Slide Number Placeholder 3"/>
           <p:cNvSpPr>
             <a:spLocks noGrp="1"/>
           </p:cNvSpPr>
@@ -682,7 +682,7 @@
       </p:grpSpPr>
       <p:sp>
         <p:nvSpPr>
-          <p:cNvPr id="1564403277" name="Title 1"/>
+          <p:cNvPr id="1785205812" name="Title 1"/>
           <p:cNvSpPr>
             <a:spLocks noGrp="1"/>
           </p:cNvSpPr>
@@ -717,7 +717,7 @@
       </p:sp>
       <p:sp>
         <p:nvSpPr>
-          <p:cNvPr id="1091337095" name="Subtitle 2"/>
+          <p:cNvPr id="1717457290" name="Subtitle 2"/>
           <p:cNvSpPr>
             <a:spLocks noGrp="1"/>
           </p:cNvSpPr>
@@ -785,7 +785,7 @@
       </p:sp>
       <p:sp>
         <p:nvSpPr>
-          <p:cNvPr id="652366219" name="Date Placeholder 3"/>
+          <p:cNvPr id="526260878" name="Date Placeholder 3"/>
           <p:cNvSpPr>
             <a:spLocks noGrp="1"/>
           </p:cNvSpPr>
@@ -811,7 +811,7 @@
       </p:sp>
       <p:sp>
         <p:nvSpPr>
-          <p:cNvPr id="38872775" name="Footer Placeholder 4"/>
+          <p:cNvPr id="316160737" name="Footer Placeholder 4"/>
           <p:cNvSpPr>
             <a:spLocks noGrp="1"/>
           </p:cNvSpPr>
@@ -833,7 +833,7 @@
       </p:sp>
       <p:sp>
         <p:nvSpPr>
-          <p:cNvPr id="1245022431" name="Slide Number Placeholder 5"/>
+          <p:cNvPr id="138954280" name="Slide Number Placeholder 5"/>
           <p:cNvSpPr>
             <a:spLocks noGrp="1"/>
           </p:cNvSpPr>
@@ -884,7 +884,7 @@
       </p:grpSpPr>
       <p:sp>
         <p:nvSpPr>
-          <p:cNvPr id="1517497651" name="Title 1"/>
+          <p:cNvPr id="797333918" name="Title 1"/>
           <p:cNvSpPr>
             <a:spLocks noGrp="1"/>
           </p:cNvSpPr>
@@ -910,7 +910,7 @@
       </p:sp>
       <p:sp>
         <p:nvSpPr>
-          <p:cNvPr id="815357237" name="Vertical Text Placeholder 2"/>
+          <p:cNvPr id="2069143509" name="Vertical Text Placeholder 2"/>
           <p:cNvSpPr>
             <a:spLocks noGrp="1"/>
           </p:cNvSpPr>
@@ -976,7 +976,7 @@
       </p:sp>
       <p:sp>
         <p:nvSpPr>
-          <p:cNvPr id="1655332073" name="Date Placeholder 3"/>
+          <p:cNvPr id="581406125" name="Date Placeholder 3"/>
           <p:cNvSpPr>
             <a:spLocks noGrp="1"/>
           </p:cNvSpPr>
@@ -1002,7 +1002,7 @@
       </p:sp>
       <p:sp>
         <p:nvSpPr>
-          <p:cNvPr id="1777617709" name="Footer Placeholder 4"/>
+          <p:cNvPr id="1418205368" name="Footer Placeholder 4"/>
           <p:cNvSpPr>
             <a:spLocks noGrp="1"/>
           </p:cNvSpPr>
@@ -1024,7 +1024,7 @@
       </p:sp>
       <p:sp>
         <p:nvSpPr>
-          <p:cNvPr id="1120511348" name="Slide Number Placeholder 5"/>
+          <p:cNvPr id="191156416" name="Slide Number Placeholder 5"/>
           <p:cNvSpPr>
             <a:spLocks noGrp="1"/>
           </p:cNvSpPr>
@@ -1075,7 +1075,7 @@
       </p:grpSpPr>
       <p:sp>
         <p:nvSpPr>
-          <p:cNvPr id="212601599" name="Vertical Title 1"/>
+          <p:cNvPr id="485400129" name="Vertical Title 1"/>
           <p:cNvSpPr>
             <a:spLocks noGrp="1"/>
           </p:cNvSpPr>
@@ -1106,7 +1106,7 @@
       </p:sp>
       <p:sp>
         <p:nvSpPr>
-          <p:cNvPr id="1663359783" name="Vertical Text Placeholder 2"/>
+          <p:cNvPr id="144165941" name="Vertical Text Placeholder 2"/>
           <p:cNvSpPr>
             <a:spLocks noGrp="1"/>
           </p:cNvSpPr>
@@ -1177,7 +1177,7 @@
       </p:sp>
       <p:sp>
         <p:nvSpPr>
-          <p:cNvPr id="1005202440" name="Date Placeholder 3"/>
+          <p:cNvPr id="500964242" name="Date Placeholder 3"/>
           <p:cNvSpPr>
             <a:spLocks noGrp="1"/>
           </p:cNvSpPr>
@@ -1203,7 +1203,7 @@
       </p:sp>
       <p:sp>
         <p:nvSpPr>
-          <p:cNvPr id="1549624570" name="Footer Placeholder 4"/>
+          <p:cNvPr id="1787006103" name="Footer Placeholder 4"/>
           <p:cNvSpPr>
             <a:spLocks noGrp="1"/>
           </p:cNvSpPr>
@@ -1225,7 +1225,7 @@
       </p:sp>
       <p:sp>
         <p:nvSpPr>
-          <p:cNvPr id="606023826" name="Slide Number Placeholder 5"/>
+          <p:cNvPr id="1031622441" name="Slide Number Placeholder 5"/>
           <p:cNvSpPr>
             <a:spLocks noGrp="1"/>
           </p:cNvSpPr>
@@ -1276,7 +1276,7 @@
       </p:grpSpPr>
       <p:sp>
         <p:nvSpPr>
-          <p:cNvPr id="595217115" name="Title 1"/>
+          <p:cNvPr id="893027747" name="Title 1"/>
           <p:cNvSpPr>
             <a:spLocks noGrp="1"/>
           </p:cNvSpPr>
@@ -1302,7 +1302,7 @@
       </p:sp>
       <p:sp>
         <p:nvSpPr>
-          <p:cNvPr id="283214457" name="Content Placeholder 2"/>
+          <p:cNvPr id="687805173" name="Content Placeholder 2"/>
           <p:cNvSpPr>
             <a:spLocks noGrp="1"/>
           </p:cNvSpPr>
@@ -1368,7 +1368,7 @@
       </p:sp>
       <p:sp>
         <p:nvSpPr>
-          <p:cNvPr id="1859129214" name="Date Placeholder 3"/>
+          <p:cNvPr id="1255179849" name="Date Placeholder 3"/>
           <p:cNvSpPr>
             <a:spLocks noGrp="1"/>
           </p:cNvSpPr>
@@ -1394,7 +1394,7 @@
       </p:sp>
       <p:sp>
         <p:nvSpPr>
-          <p:cNvPr id="2058045382" name="Footer Placeholder 4"/>
+          <p:cNvPr id="1764945369" name="Footer Placeholder 4"/>
           <p:cNvSpPr>
             <a:spLocks noGrp="1"/>
           </p:cNvSpPr>
@@ -1416,7 +1416,7 @@
       </p:sp>
       <p:sp>
         <p:nvSpPr>
-          <p:cNvPr id="3656284" name="Slide Number Placeholder 5"/>
+          <p:cNvPr id="1451780263" name="Slide Number Placeholder 5"/>
           <p:cNvSpPr>
             <a:spLocks noGrp="1"/>
           </p:cNvSpPr>
@@ -1467,7 +1467,7 @@
       </p:grpSpPr>
       <p:sp>
         <p:nvSpPr>
-          <p:cNvPr id="167866180" name="Title 1"/>
+          <p:cNvPr id="482409535" name="Title 1"/>
           <p:cNvSpPr>
             <a:spLocks noGrp="1"/>
           </p:cNvSpPr>
@@ -1502,7 +1502,7 @@
       </p:sp>
       <p:sp>
         <p:nvSpPr>
-          <p:cNvPr id="369469020" name="Text Placeholder 2"/>
+          <p:cNvPr id="398222925" name="Text Placeholder 2"/>
           <p:cNvSpPr>
             <a:spLocks noGrp="1"/>
           </p:cNvSpPr>
@@ -1624,7 +1624,7 @@
       </p:sp>
       <p:sp>
         <p:nvSpPr>
-          <p:cNvPr id="236500787" name="Date Placeholder 3"/>
+          <p:cNvPr id="1906181770" name="Date Placeholder 3"/>
           <p:cNvSpPr>
             <a:spLocks noGrp="1"/>
           </p:cNvSpPr>
@@ -1650,7 +1650,7 @@
       </p:sp>
       <p:sp>
         <p:nvSpPr>
-          <p:cNvPr id="1646611541" name="Footer Placeholder 4"/>
+          <p:cNvPr id="1386485185" name="Footer Placeholder 4"/>
           <p:cNvSpPr>
             <a:spLocks noGrp="1"/>
           </p:cNvSpPr>
@@ -1672,7 +1672,7 @@
       </p:sp>
       <p:sp>
         <p:nvSpPr>
-          <p:cNvPr id="1105209232" name="Slide Number Placeholder 5"/>
+          <p:cNvPr id="1700998155" name="Slide Number Placeholder 5"/>
           <p:cNvSpPr>
             <a:spLocks noGrp="1"/>
           </p:cNvSpPr>
@@ -1723,7 +1723,7 @@
       </p:grpSpPr>
       <p:sp>
         <p:nvSpPr>
-          <p:cNvPr id="1054969617" name="Title 1"/>
+          <p:cNvPr id="1115095069" name="Title 1"/>
           <p:cNvSpPr>
             <a:spLocks noGrp="1"/>
           </p:cNvSpPr>
@@ -1749,7 +1749,7 @@
       </p:sp>
       <p:sp>
         <p:nvSpPr>
-          <p:cNvPr id="75554168" name="Content Placeholder 2"/>
+          <p:cNvPr id="373821804" name="Content Placeholder 2"/>
           <p:cNvSpPr>
             <a:spLocks noGrp="1"/>
           </p:cNvSpPr>
@@ -1820,7 +1820,7 @@
       </p:sp>
       <p:sp>
         <p:nvSpPr>
-          <p:cNvPr id="2005832496" name="Content Placeholder 3"/>
+          <p:cNvPr id="1673605944" name="Content Placeholder 3"/>
           <p:cNvSpPr>
             <a:spLocks noGrp="1"/>
           </p:cNvSpPr>
@@ -1891,7 +1891,7 @@
       </p:sp>
       <p:sp>
         <p:nvSpPr>
-          <p:cNvPr id="1849017873" name="Date Placeholder 4"/>
+          <p:cNvPr id="185188195" name="Date Placeholder 4"/>
           <p:cNvSpPr>
             <a:spLocks noGrp="1"/>
           </p:cNvSpPr>
@@ -1917,7 +1917,7 @@
       </p:sp>
       <p:sp>
         <p:nvSpPr>
-          <p:cNvPr id="1817710903" name="Footer Placeholder 5"/>
+          <p:cNvPr id="1702996514" name="Footer Placeholder 5"/>
           <p:cNvSpPr>
             <a:spLocks noGrp="1"/>
           </p:cNvSpPr>
@@ -1939,7 +1939,7 @@
       </p:sp>
       <p:sp>
         <p:nvSpPr>
-          <p:cNvPr id="126491741" name="Slide Number Placeholder 6"/>
+          <p:cNvPr id="456170470" name="Slide Number Placeholder 6"/>
           <p:cNvSpPr>
             <a:spLocks noGrp="1"/>
           </p:cNvSpPr>
@@ -1990,7 +1990,7 @@
       </p:grpSpPr>
       <p:sp>
         <p:nvSpPr>
-          <p:cNvPr id="87878330" name="Title 1"/>
+          <p:cNvPr id="786965078" name="Title 1"/>
           <p:cNvSpPr>
             <a:spLocks noGrp="1"/>
           </p:cNvSpPr>
@@ -2021,7 +2021,7 @@
       </p:sp>
       <p:sp>
         <p:nvSpPr>
-          <p:cNvPr id="717896407" name="Text Placeholder 2"/>
+          <p:cNvPr id="806211809" name="Text Placeholder 2"/>
           <p:cNvSpPr>
             <a:spLocks noGrp="1"/>
           </p:cNvSpPr>
@@ -2089,7 +2089,7 @@
       </p:sp>
       <p:sp>
         <p:nvSpPr>
-          <p:cNvPr id="713545115" name="Content Placeholder 3"/>
+          <p:cNvPr id="1022753281" name="Content Placeholder 3"/>
           <p:cNvSpPr>
             <a:spLocks noGrp="1"/>
           </p:cNvSpPr>
@@ -2160,7 +2160,7 @@
       </p:sp>
       <p:sp>
         <p:nvSpPr>
-          <p:cNvPr id="1728445912" name="Text Placeholder 4"/>
+          <p:cNvPr id="18224955" name="Text Placeholder 4"/>
           <p:cNvSpPr>
             <a:spLocks noGrp="1"/>
           </p:cNvSpPr>
@@ -2228,7 +2228,7 @@
       </p:sp>
       <p:sp>
         <p:nvSpPr>
-          <p:cNvPr id="941679055" name="Content Placeholder 5"/>
+          <p:cNvPr id="2043508110" name="Content Placeholder 5"/>
           <p:cNvSpPr>
             <a:spLocks noGrp="1"/>
           </p:cNvSpPr>
@@ -2299,7 +2299,7 @@
       </p:sp>
       <p:sp>
         <p:nvSpPr>
-          <p:cNvPr id="1135598435" name="Date Placeholder 6"/>
+          <p:cNvPr id="1325910477" name="Date Placeholder 6"/>
           <p:cNvSpPr>
             <a:spLocks noGrp="1"/>
           </p:cNvSpPr>
@@ -2325,7 +2325,7 @@
       </p:sp>
       <p:sp>
         <p:nvSpPr>
-          <p:cNvPr id="1198603755" name="Footer Placeholder 7"/>
+          <p:cNvPr id="1883899192" name="Footer Placeholder 7"/>
           <p:cNvSpPr>
             <a:spLocks noGrp="1"/>
           </p:cNvSpPr>
@@ -2347,7 +2347,7 @@
       </p:sp>
       <p:sp>
         <p:nvSpPr>
-          <p:cNvPr id="506040602" name="Slide Number Placeholder 8"/>
+          <p:cNvPr id="1880048590" name="Slide Number Placeholder 8"/>
           <p:cNvSpPr>
             <a:spLocks noGrp="1"/>
           </p:cNvSpPr>
@@ -2398,7 +2398,7 @@
       </p:grpSpPr>
       <p:sp>
         <p:nvSpPr>
-          <p:cNvPr id="490163931" name="Title 1"/>
+          <p:cNvPr id="1480876671" name="Title 1"/>
           <p:cNvSpPr>
             <a:spLocks noGrp="1"/>
           </p:cNvSpPr>
@@ -2424,7 +2424,7 @@
       </p:sp>
       <p:sp>
         <p:nvSpPr>
-          <p:cNvPr id="333348645" name="Date Placeholder 2"/>
+          <p:cNvPr id="1385556559" name="Date Placeholder 2"/>
           <p:cNvSpPr>
             <a:spLocks noGrp="1"/>
           </p:cNvSpPr>
@@ -2450,7 +2450,7 @@
       </p:sp>
       <p:sp>
         <p:nvSpPr>
-          <p:cNvPr id="922946417" name="Footer Placeholder 3"/>
+          <p:cNvPr id="1597742493" name="Footer Placeholder 3"/>
           <p:cNvSpPr>
             <a:spLocks noGrp="1"/>
           </p:cNvSpPr>
@@ -2472,7 +2472,7 @@
       </p:sp>
       <p:sp>
         <p:nvSpPr>
-          <p:cNvPr id="1892213749" name="Slide Number Placeholder 4"/>
+          <p:cNvPr id="1457271289" name="Slide Number Placeholder 4"/>
           <p:cNvSpPr>
             <a:spLocks noGrp="1"/>
           </p:cNvSpPr>
@@ -2523,7 +2523,7 @@
       </p:grpSpPr>
       <p:sp>
         <p:nvSpPr>
-          <p:cNvPr id="1611437625" name="Date Placeholder 1"/>
+          <p:cNvPr id="302186378" name="Date Placeholder 1"/>
           <p:cNvSpPr>
             <a:spLocks noGrp="1"/>
           </p:cNvSpPr>
@@ -2549,7 +2549,7 @@
       </p:sp>
       <p:sp>
         <p:nvSpPr>
-          <p:cNvPr id="1560799679" name="Footer Placeholder 2"/>
+          <p:cNvPr id="1411615157" name="Footer Placeholder 2"/>
           <p:cNvSpPr>
             <a:spLocks noGrp="1"/>
           </p:cNvSpPr>
@@ -2571,7 +2571,7 @@
       </p:sp>
       <p:sp>
         <p:nvSpPr>
-          <p:cNvPr id="1022700044" name="Slide Number Placeholder 3"/>
+          <p:cNvPr id="1733308550" name="Slide Number Placeholder 3"/>
           <p:cNvSpPr>
             <a:spLocks noGrp="1"/>
           </p:cNvSpPr>
@@ -2622,7 +2622,7 @@
       </p:grpSpPr>
       <p:sp>
         <p:nvSpPr>
-          <p:cNvPr id="1771660944" name="Title 1"/>
+          <p:cNvPr id="121090940" name="Title 1"/>
           <p:cNvSpPr>
             <a:spLocks noGrp="1"/>
           </p:cNvSpPr>
@@ -2657,7 +2657,7 @@
       </p:sp>
       <p:sp>
         <p:nvSpPr>
-          <p:cNvPr id="1432493504" name="Content Placeholder 2"/>
+          <p:cNvPr id="496254467" name="Content Placeholder 2"/>
           <p:cNvSpPr>
             <a:spLocks noGrp="1"/>
           </p:cNvSpPr>
@@ -2756,7 +2756,7 @@
       </p:sp>
       <p:sp>
         <p:nvSpPr>
-          <p:cNvPr id="357110693" name="Text Placeholder 3"/>
+          <p:cNvPr id="1732821442" name="Text Placeholder 3"/>
           <p:cNvSpPr>
             <a:spLocks noGrp="1"/>
           </p:cNvSpPr>
@@ -2824,7 +2824,7 @@
       </p:sp>
       <p:sp>
         <p:nvSpPr>
-          <p:cNvPr id="1180483750" name="Date Placeholder 4"/>
+          <p:cNvPr id="1295321470" name="Date Placeholder 4"/>
           <p:cNvSpPr>
             <a:spLocks noGrp="1"/>
           </p:cNvSpPr>
@@ -2850,7 +2850,7 @@
       </p:sp>
       <p:sp>
         <p:nvSpPr>
-          <p:cNvPr id="201877298" name="Footer Placeholder 5"/>
+          <p:cNvPr id="2117806333" name="Footer Placeholder 5"/>
           <p:cNvSpPr>
             <a:spLocks noGrp="1"/>
           </p:cNvSpPr>
@@ -2872,7 +2872,7 @@
       </p:sp>
       <p:sp>
         <p:nvSpPr>
-          <p:cNvPr id="40471448" name="Slide Number Placeholder 6"/>
+          <p:cNvPr id="382227517" name="Slide Number Placeholder 6"/>
           <p:cNvSpPr>
             <a:spLocks noGrp="1"/>
           </p:cNvSpPr>
@@ -2923,7 +2923,7 @@
       </p:grpSpPr>
       <p:sp>
         <p:nvSpPr>
-          <p:cNvPr id="1657485218" name="Title 1"/>
+          <p:cNvPr id="1032439526" name="Title 1"/>
           <p:cNvSpPr>
             <a:spLocks noGrp="1"/>
           </p:cNvSpPr>
@@ -2958,7 +2958,7 @@
       </p:sp>
       <p:sp>
         <p:nvSpPr>
-          <p:cNvPr id="386712251" name="Picture Placeholder 2"/>
+          <p:cNvPr id="808263457" name="Picture Placeholder 2"/>
           <p:cNvSpPr>
             <a:spLocks noChangeAspect="1" noGrp="1"/>
           </p:cNvSpPr>
@@ -3026,7 +3026,7 @@
       </p:sp>
       <p:sp>
         <p:nvSpPr>
-          <p:cNvPr id="1950722791" name="Text Placeholder 3"/>
+          <p:cNvPr id="168763353" name="Text Placeholder 3"/>
           <p:cNvSpPr>
             <a:spLocks noGrp="1"/>
           </p:cNvSpPr>
@@ -3094,7 +3094,7 @@
       </p:sp>
       <p:sp>
         <p:nvSpPr>
-          <p:cNvPr id="1951244337" name="Date Placeholder 4"/>
+          <p:cNvPr id="2039827470" name="Date Placeholder 4"/>
           <p:cNvSpPr>
             <a:spLocks noGrp="1"/>
           </p:cNvSpPr>
@@ -3120,7 +3120,7 @@
       </p:sp>
       <p:sp>
         <p:nvSpPr>
-          <p:cNvPr id="227585888" name="Footer Placeholder 5"/>
+          <p:cNvPr id="2033123798" name="Footer Placeholder 5"/>
           <p:cNvSpPr>
             <a:spLocks noGrp="1"/>
           </p:cNvSpPr>
@@ -3142,7 +3142,7 @@
       </p:sp>
       <p:sp>
         <p:nvSpPr>
-          <p:cNvPr id="375998812" name="Slide Number Placeholder 6"/>
+          <p:cNvPr id="297408009" name="Slide Number Placeholder 6"/>
           <p:cNvSpPr>
             <a:spLocks noGrp="1"/>
           </p:cNvSpPr>
@@ -3198,7 +3198,7 @@
       </p:grpSpPr>
       <p:sp>
         <p:nvSpPr>
-          <p:cNvPr id="1614004766" name="Title Placeholder 1"/>
+          <p:cNvPr id="1848840682" name="Title Placeholder 1"/>
           <p:cNvSpPr>
             <a:spLocks noGrp="1"/>
           </p:cNvSpPr>
@@ -3234,7 +3234,7 @@
       </p:sp>
       <p:sp>
         <p:nvSpPr>
-          <p:cNvPr id="1504494282" name="Text Placeholder 2"/>
+          <p:cNvPr id="768914306" name="Text Placeholder 2"/>
           <p:cNvSpPr>
             <a:spLocks noGrp="1"/>
           </p:cNvSpPr>
@@ -3310,7 +3310,7 @@
       </p:sp>
       <p:sp>
         <p:nvSpPr>
-          <p:cNvPr id="303998473" name="Date Placeholder 3"/>
+          <p:cNvPr id="1929628845" name="Date Placeholder 3"/>
           <p:cNvSpPr>
             <a:spLocks noGrp="1"/>
           </p:cNvSpPr>
@@ -3354,7 +3354,7 @@
       </p:sp>
       <p:sp>
         <p:nvSpPr>
-          <p:cNvPr id="1097113464" name="Footer Placeholder 4"/>
+          <p:cNvPr id="1936303371" name="Footer Placeholder 4"/>
           <p:cNvSpPr>
             <a:spLocks noGrp="1"/>
           </p:cNvSpPr>
@@ -3394,7 +3394,7 @@
       </p:sp>
       <p:sp>
         <p:nvSpPr>
-          <p:cNvPr id="19502326" name="Slide Number Placeholder 5"/>
+          <p:cNvPr id="676621935" name="Slide Number Placeholder 5"/>
           <p:cNvSpPr>
             <a:spLocks noGrp="1"/>
           </p:cNvSpPr>
@@ -3754,7 +3754,7 @@
       </p:grpSpPr>
       <p:sp>
         <p:nvSpPr>
-          <p:cNvPr id="1083728744" name=""/>
+          <p:cNvPr id="1146543630" name=""/>
           <p:cNvSpPr/>
           <p:nvPr/>
         </p:nvSpPr>
@@ -3796,7 +3796,7 @@
       </p:sp>
       <p:sp>
         <p:nvSpPr>
-          <p:cNvPr id="178235926" name="Title 1"/>
+          <p:cNvPr id="446466340" name="Title 1"/>
           <p:cNvSpPr>
             <a:spLocks noGrp="1"/>
           </p:cNvSpPr>
@@ -3861,7 +3861,19 @@
             </a:br>
             <a:r>
               <a:rPr lang="en-US" sz="2000" b="0"/>
-              <a:t>Sérgio Leandro dos Santos</a:t>
+              <a:t>Sérgio Leandro dos Santos - </a:t>
+            </a:r>
+            <a:r>
+              <a:rPr lang="en-US" sz="2000" b="0" i="0" u="sng" strike="noStrike" cap="none" spc="0">
+                <a:solidFill>
+                  <a:schemeClr val="tx1"/>
+                </a:solidFill>
+                <a:latin typeface="Arial"/>
+                <a:ea typeface="Arial"/>
+                <a:cs typeface="Arial"/>
+                <a:hlinkClick r:id="rId3" tooltip="Streamlit App"/>
+              </a:rPr>
+              <a:t>https://estudo-ocupacao-salas.streamlit.app/</a:t>
             </a:r>
             <a:endParaRPr b="0"/>
           </a:p>
@@ -3869,7 +3881,7 @@
       </p:sp>
       <p:sp>
         <p:nvSpPr>
-          <p:cNvPr id="1404113706" name="Subtitle 2"/>
+          <p:cNvPr id="1838460018" name="Subtitle 2"/>
           <p:cNvSpPr>
             <a:spLocks noGrp="1"/>
           </p:cNvSpPr>
@@ -3923,7 +3935,7 @@
                 <a:ea typeface="Arial"/>
                 <a:cs typeface="Arial"/>
               </a:rPr>
-              <a:t>A atividade reorganiza 289 encontros em 23 salas, com foco nas disciplinas de graduação. Depois da parte inicial de analise dos dados e distribuição atuaisdas disciplinas, o modelo de otimização gera três propostas, respeitando capacidade das salas, conflitos de horários e compatibilidade entre turmas. </a:t>
+              <a:t>A atividade reorganiza 289 encontros em 23 salas, com foco nas disciplinas de graduação. Depois da parte inicial de analise dos dados e distribuição atuais das disciplinas, o modelo de otimização gera três propostas, respeitando capacidade das salas, conflitos de horários e compatibilidade entre turmas. </a:t>
             </a:r>
             <a:r>
               <a:rPr lang="en-US" sz="1600" b="0" i="0" u="none" strike="noStrike" cap="none" spc="0">
@@ -3956,7 +3968,7 @@
                 <a:ea typeface="Arial"/>
                 <a:cs typeface="Arial"/>
               </a:rPr>
-              <a:t>tenta manter a grade o mais parecida possível com a atual, mas reduz primeiro as aulas fora do turno-alvo.</a:t>
+              <a:t>tenta manter a grade o mais parecida possível com a atual, mas reduz primeiro as aulas fora do turno-alvo</a:t>
             </a:r>
             <a:r>
               <a:rPr sz="1600" b="0" i="0" u="none">
@@ -4000,7 +4012,7 @@
                 <a:ea typeface="Arial"/>
                 <a:cs typeface="Arial"/>
               </a:rPr>
-              <a:t>reorganiza os horários para distribuir melhor a carga semanal entre etapas e docentes.</a:t>
+              <a:t>reorganiza os horários para distribuir melhor a carga semanal entre etapas e docentes</a:t>
             </a:r>
             <a:r>
               <a:rPr sz="1600" b="0" i="0" u="none">
@@ -4081,14 +4093,14 @@
       </p:sp>
       <p:pic>
         <p:nvPicPr>
-          <p:cNvPr id="1840566621" name=""/>
+          <p:cNvPr id="1160268387" name=""/>
           <p:cNvPicPr>
             <a:picLocks noChangeAspect="1"/>
           </p:cNvPicPr>
           <p:nvPr/>
         </p:nvPicPr>
         <p:blipFill rotWithShape="1">
-          <a:blip r:embed="rId3"/>
+          <a:blip r:embed="rId4"/>
           <a:stretch/>
         </p:blipFill>
         <p:spPr bwMode="auto">
@@ -4103,14 +4115,14 @@
       </p:pic>
       <p:pic>
         <p:nvPicPr>
-          <p:cNvPr id="1333617832" name=""/>
+          <p:cNvPr id="648237064" name=""/>
           <p:cNvPicPr>
             <a:picLocks noChangeAspect="1"/>
           </p:cNvPicPr>
           <p:nvPr/>
         </p:nvPicPr>
         <p:blipFill rotWithShape="1">
-          <a:blip r:embed="rId4"/>
+          <a:blip r:embed="rId5"/>
           <a:stretch/>
         </p:blipFill>
         <p:spPr bwMode="auto">
@@ -4158,7 +4170,7 @@
       </p:grpSpPr>
       <p:sp>
         <p:nvSpPr>
-          <p:cNvPr id="592119497" name=""/>
+          <p:cNvPr id="2039951834" name=""/>
           <p:cNvSpPr/>
           <p:nvPr/>
         </p:nvSpPr>
@@ -4200,7 +4212,7 @@
       </p:sp>
       <p:pic>
         <p:nvPicPr>
-          <p:cNvPr id="1364195789" name=""/>
+          <p:cNvPr id="1026152836" name=""/>
           <p:cNvPicPr>
             <a:picLocks noChangeAspect="1"/>
           </p:cNvPicPr>
@@ -4222,7 +4234,7 @@
       </p:pic>
       <p:pic>
         <p:nvPicPr>
-          <p:cNvPr id="17236303" name=""/>
+          <p:cNvPr id="192792990" name=""/>
           <p:cNvPicPr>
             <a:picLocks noChangeAspect="1"/>
           </p:cNvPicPr>
@@ -4244,7 +4256,7 @@
       </p:pic>
       <p:sp>
         <p:nvSpPr>
-          <p:cNvPr id="1625216663" name=""/>
+          <p:cNvPr id="2073556400" name=""/>
           <p:cNvSpPr/>
           <p:nvPr/>
         </p:nvSpPr>
@@ -4289,7 +4301,7 @@
       </p:sp>
       <p:sp>
         <p:nvSpPr>
-          <p:cNvPr id="2038347375" name=""/>
+          <p:cNvPr id="519266760" name=""/>
           <p:cNvSpPr/>
           <p:nvPr/>
         </p:nvSpPr>
@@ -4331,7 +4343,7 @@
       </p:sp>
       <p:cxnSp>
         <p:nvCxnSpPr>
-          <p:cNvPr id="511729436" name=""/>
+          <p:cNvPr id="1405912753" name=""/>
           <p:cNvCxnSpPr/>
           <p:nvPr/>
         </p:nvCxnSpPr>
@@ -4366,7 +4378,7 @@
       </p:cxnSp>
       <p:cxnSp>
         <p:nvCxnSpPr>
-          <p:cNvPr id="412365023" name=""/>
+          <p:cNvPr id="1080699777" name=""/>
           <p:cNvCxnSpPr/>
           <p:nvPr/>
         </p:nvCxnSpPr>
@@ -4401,7 +4413,7 @@
       </p:cxnSp>
       <p:pic>
         <p:nvPicPr>
-          <p:cNvPr id="893291520" name=""/>
+          <p:cNvPr id="1986628833" name=""/>
           <p:cNvPicPr>
             <a:picLocks noChangeAspect="1"/>
           </p:cNvPicPr>
@@ -4423,7 +4435,7 @@
       </p:pic>
       <p:sp>
         <p:nvSpPr>
-          <p:cNvPr id="1736857849" name=""/>
+          <p:cNvPr id="1153152545" name=""/>
           <p:cNvSpPr/>
           <p:nvPr/>
         </p:nvSpPr>
